--- a/V2/managers/test.pptx
+++ b/V2/managers/test.pptx
@@ -3090,7 +3090,7 @@
       <p:grpSpPr/>
       <p:pic>
         <p:nvPicPr>
-          <p:cNvPr id="2" name="Picture 1" descr="tmpd_ybmpnn.png"/>
+          <p:cNvPr id="2" name="Picture 1" descr="tmp7dboiq_u.png"/>
           <p:cNvPicPr>
             <a:picLocks noChangeAspect="1"/>
           </p:cNvPicPr>
@@ -3120,7 +3120,7 @@
         </p:nvSpPr>
         <p:spPr>
           <a:xfrm>
-            <a:off x="10287000" y="4953000"/>
+            <a:off x="7747000" y="5588000"/>
             <a:ext cx="8890000" cy="2540000"/>
           </a:xfrm>
           <a:prstGeom prst="rect">
@@ -3134,8 +3134,8 @@
           </a:bodyPr>
           <a:lstStyle/>
           <a:p>
-            <a:pPr algn="l">
-              <a:defRPr sz="1000" b="0" i="0">
+            <a:pPr algn="r">
+              <a:defRPr sz="5000" b="0" i="0">
                 <a:solidFill>
                   <a:srgbClr val="FFFFFF"/>
                 </a:solidFill>
